--- a/FDP_Project Submission_Pavana.pptx
+++ b/FDP_Project Submission_Pavana.pptx
@@ -12,17 +12,18 @@
     <p:sldId id="257" r:id="rId4"/>
     <p:sldId id="282" r:id="rId6"/>
     <p:sldId id="285" r:id="rId7"/>
-    <p:sldId id="278" r:id="rId8"/>
-    <p:sldId id="264" r:id="rId9"/>
-    <p:sldId id="291" r:id="rId10"/>
-    <p:sldId id="292" r:id="rId11"/>
-    <p:sldId id="293" r:id="rId12"/>
-    <p:sldId id="286" r:id="rId13"/>
-    <p:sldId id="287" r:id="rId14"/>
-    <p:sldId id="280" r:id="rId15"/>
-    <p:sldId id="288" r:id="rId16"/>
-    <p:sldId id="289" r:id="rId17"/>
-    <p:sldId id="276" r:id="rId18"/>
+    <p:sldId id="294" r:id="rId8"/>
+    <p:sldId id="278" r:id="rId9"/>
+    <p:sldId id="264" r:id="rId10"/>
+    <p:sldId id="291" r:id="rId11"/>
+    <p:sldId id="292" r:id="rId12"/>
+    <p:sldId id="293" r:id="rId13"/>
+    <p:sldId id="286" r:id="rId14"/>
+    <p:sldId id="287" r:id="rId15"/>
+    <p:sldId id="280" r:id="rId16"/>
+    <p:sldId id="288" r:id="rId17"/>
+    <p:sldId id="289" r:id="rId18"/>
+    <p:sldId id="276" r:id="rId19"/>
   </p:sldIdLst>
   <p:sldSz cx="12192000" cy="6858000"/>
   <p:notesSz cx="6858000" cy="9144000"/>
@@ -805,7 +806,7 @@
   <p:cSld>
     <p:spTree>
       <p:nvGrpSpPr>
-        <p:cNvPr id="1" name="Shape 271"/>
+        <p:cNvPr id="1" name="Shape 197"/>
         <p:cNvGrpSpPr/>
         <p:nvPr/>
       </p:nvGrpSpPr>
@@ -819,7 +820,7 @@
       </p:grpSpPr>
       <p:sp>
         <p:nvSpPr>
-          <p:cNvPr id="272" name="Google Shape;272;p18:notes"/>
+          <p:cNvPr id="198" name="Google Shape;198;p10:notes"/>
           <p:cNvSpPr txBox="1">
             <a:spLocks noGrp="1"/>
           </p:cNvSpPr>
@@ -856,7 +857,7 @@
       </p:sp>
       <p:sp>
         <p:nvSpPr>
-          <p:cNvPr id="273" name="Google Shape;273;p18:notes"/>
+          <p:cNvPr id="199" name="Google Shape;199;p10:notes"/>
           <p:cNvSpPr>
             <a:spLocks noGrp="1" noRot="1" noChangeAspect="1"/>
           </p:cNvSpPr>
@@ -1007,6 +1008,109 @@
 </file>
 
 <file path=ppt/notesSlides/notesSlide12.xml><?xml version="1.0" encoding="utf-8"?>
+<p:notes xmlns:a="http://schemas.openxmlformats.org/drawingml/2006/main" xmlns:r="http://schemas.openxmlformats.org/officeDocument/2006/relationships" xmlns:p="http://schemas.openxmlformats.org/presentationml/2006/main" showMasterPhAnim="0" showMasterSp="0">
+  <p:cSld>
+    <p:spTree>
+      <p:nvGrpSpPr>
+        <p:cNvPr id="1" name="Shape 271"/>
+        <p:cNvGrpSpPr/>
+        <p:nvPr/>
+      </p:nvGrpSpPr>
+      <p:grpSpPr>
+        <a:xfrm>
+          <a:off x="0" y="0"/>
+          <a:ext cx="0" cy="0"/>
+          <a:chOff x="0" y="0"/>
+          <a:chExt cx="0" cy="0"/>
+        </a:xfrm>
+      </p:grpSpPr>
+      <p:sp>
+        <p:nvSpPr>
+          <p:cNvPr id="272" name="Google Shape;272;p18:notes"/>
+          <p:cNvSpPr txBox="1">
+            <a:spLocks noGrp="1"/>
+          </p:cNvSpPr>
+          <p:nvPr>
+            <p:ph type="body" idx="1"/>
+          </p:nvPr>
+        </p:nvSpPr>
+        <p:spPr>
+          <a:xfrm>
+            <a:off x="685800" y="4343400"/>
+            <a:ext cx="5486400" cy="4114800"/>
+          </a:xfrm>
+          <a:prstGeom prst="rect">
+            <a:avLst/>
+          </a:prstGeom>
+        </p:spPr>
+        <p:txBody>
+          <a:bodyPr spcFirstLastPara="1" wrap="square" lIns="91425" tIns="91425" rIns="91425" bIns="91425" anchor="t" anchorCtr="0">
+            <a:noAutofit/>
+          </a:bodyPr>
+          <a:lstStyle/>
+          <a:p>
+            <a:pPr marL="0" lvl="0" indent="0" algn="l" rtl="0">
+              <a:spcBef>
+                <a:spcPts val="0"/>
+              </a:spcBef>
+              <a:spcAft>
+                <a:spcPts val="0"/>
+              </a:spcAft>
+              <a:buNone/>
+            </a:pPr>
+          </a:p>
+        </p:txBody>
+      </p:sp>
+      <p:sp>
+        <p:nvSpPr>
+          <p:cNvPr id="273" name="Google Shape;273;p18:notes"/>
+          <p:cNvSpPr>
+            <a:spLocks noGrp="1" noRot="1" noChangeAspect="1"/>
+          </p:cNvSpPr>
+          <p:nvPr>
+            <p:ph type="sldImg" idx="2"/>
+          </p:nvPr>
+        </p:nvSpPr>
+        <p:spPr>
+          <a:xfrm>
+            <a:off x="381000" y="685800"/>
+            <a:ext cx="6096000" cy="3429000"/>
+          </a:xfrm>
+          <a:custGeom>
+            <a:avLst/>
+            <a:gdLst/>
+            <a:ahLst/>
+            <a:cxnLst/>
+            <a:rect l="l" t="t" r="r" b="b"/>
+            <a:pathLst>
+              <a:path w="120000" h="120000" extrusionOk="0">
+                <a:moveTo>
+                  <a:pt x="0" y="0"/>
+                </a:moveTo>
+                <a:lnTo>
+                  <a:pt x="120000" y="0"/>
+                </a:lnTo>
+                <a:lnTo>
+                  <a:pt x="120000" y="120000"/>
+                </a:lnTo>
+                <a:lnTo>
+                  <a:pt x="0" y="120000"/>
+                </a:lnTo>
+                <a:close/>
+              </a:path>
+            </a:pathLst>
+          </a:custGeom>
+        </p:spPr>
+      </p:sp>
+    </p:spTree>
+  </p:cSld>
+  <p:clrMapOvr>
+    <a:masterClrMapping/>
+  </p:clrMapOvr>
+</p:notes>
+</file>
+
+<file path=ppt/notesSlides/notesSlide13.xml><?xml version="1.0" encoding="utf-8"?>
 <p:notes xmlns:a="http://schemas.openxmlformats.org/drawingml/2006/main" xmlns:r="http://schemas.openxmlformats.org/officeDocument/2006/relationships" xmlns:p="http://schemas.openxmlformats.org/presentationml/2006/main" showMasterPhAnim="0" showMasterSp="0">
   <p:cSld>
     <p:spTree>
@@ -1320,6 +1424,109 @@
   <p:cSld>
     <p:spTree>
       <p:nvGrpSpPr>
+        <p:cNvPr id="1" name="Shape 100"/>
+        <p:cNvGrpSpPr/>
+        <p:nvPr/>
+      </p:nvGrpSpPr>
+      <p:grpSpPr>
+        <a:xfrm>
+          <a:off x="0" y="0"/>
+          <a:ext cx="0" cy="0"/>
+          <a:chOff x="0" y="0"/>
+          <a:chExt cx="0" cy="0"/>
+        </a:xfrm>
+      </p:grpSpPr>
+      <p:sp>
+        <p:nvSpPr>
+          <p:cNvPr id="101" name="Google Shape;101;p3:notes"/>
+          <p:cNvSpPr txBox="1">
+            <a:spLocks noGrp="1"/>
+          </p:cNvSpPr>
+          <p:nvPr>
+            <p:ph type="body" idx="1"/>
+          </p:nvPr>
+        </p:nvSpPr>
+        <p:spPr>
+          <a:xfrm>
+            <a:off x="685800" y="4343400"/>
+            <a:ext cx="5486400" cy="4114800"/>
+          </a:xfrm>
+          <a:prstGeom prst="rect">
+            <a:avLst/>
+          </a:prstGeom>
+        </p:spPr>
+        <p:txBody>
+          <a:bodyPr spcFirstLastPara="1" wrap="square" lIns="91425" tIns="91425" rIns="91425" bIns="91425" anchor="t" anchorCtr="0">
+            <a:noAutofit/>
+          </a:bodyPr>
+          <a:lstStyle/>
+          <a:p>
+            <a:pPr marL="0" lvl="0" indent="0" algn="l" rtl="0">
+              <a:spcBef>
+                <a:spcPts val="0"/>
+              </a:spcBef>
+              <a:spcAft>
+                <a:spcPts val="0"/>
+              </a:spcAft>
+              <a:buNone/>
+            </a:pPr>
+          </a:p>
+        </p:txBody>
+      </p:sp>
+      <p:sp>
+        <p:nvSpPr>
+          <p:cNvPr id="102" name="Google Shape;102;p3:notes"/>
+          <p:cNvSpPr>
+            <a:spLocks noGrp="1" noRot="1" noChangeAspect="1"/>
+          </p:cNvSpPr>
+          <p:nvPr>
+            <p:ph type="sldImg" idx="2"/>
+          </p:nvPr>
+        </p:nvSpPr>
+        <p:spPr>
+          <a:xfrm>
+            <a:off x="381000" y="685800"/>
+            <a:ext cx="6096000" cy="3429000"/>
+          </a:xfrm>
+          <a:custGeom>
+            <a:avLst/>
+            <a:gdLst/>
+            <a:ahLst/>
+            <a:cxnLst/>
+            <a:rect l="l" t="t" r="r" b="b"/>
+            <a:pathLst>
+              <a:path w="120000" h="120000" extrusionOk="0">
+                <a:moveTo>
+                  <a:pt x="0" y="0"/>
+                </a:moveTo>
+                <a:lnTo>
+                  <a:pt x="120000" y="0"/>
+                </a:lnTo>
+                <a:lnTo>
+                  <a:pt x="120000" y="120000"/>
+                </a:lnTo>
+                <a:lnTo>
+                  <a:pt x="0" y="120000"/>
+                </a:lnTo>
+                <a:close/>
+              </a:path>
+            </a:pathLst>
+          </a:custGeom>
+        </p:spPr>
+      </p:sp>
+    </p:spTree>
+  </p:cSld>
+  <p:clrMapOvr>
+    <a:masterClrMapping/>
+  </p:clrMapOvr>
+</p:notes>
+</file>
+
+<file path=ppt/notesSlides/notesSlide5.xml><?xml version="1.0" encoding="utf-8"?>
+<p:notes xmlns:a="http://schemas.openxmlformats.org/drawingml/2006/main" xmlns:r="http://schemas.openxmlformats.org/officeDocument/2006/relationships" xmlns:p="http://schemas.openxmlformats.org/presentationml/2006/main" showMasterPhAnim="0" showMasterSp="0">
+  <p:cSld>
+    <p:spTree>
+      <p:nvGrpSpPr>
         <p:cNvPr id="1" name="Shape 197"/>
         <p:cNvGrpSpPr/>
         <p:nvPr/>
@@ -1418,7 +1625,7 @@
 </p:notes>
 </file>
 
-<file path=ppt/notesSlides/notesSlide5.xml><?xml version="1.0" encoding="utf-8"?>
+<file path=ppt/notesSlides/notesSlide6.xml><?xml version="1.0" encoding="utf-8"?>
 <p:notes xmlns:a="http://schemas.openxmlformats.org/drawingml/2006/main" xmlns:r="http://schemas.openxmlformats.org/officeDocument/2006/relationships" xmlns:p="http://schemas.openxmlformats.org/presentationml/2006/main" showMasterPhAnim="0" showMasterSp="0">
   <p:cSld>
     <p:spTree>
@@ -1475,109 +1682,6 @@
       <p:sp>
         <p:nvSpPr>
           <p:cNvPr id="190" name="Google Shape;190;p9:notes"/>
-          <p:cNvSpPr>
-            <a:spLocks noGrp="1" noRot="1" noChangeAspect="1"/>
-          </p:cNvSpPr>
-          <p:nvPr>
-            <p:ph type="sldImg" idx="2"/>
-          </p:nvPr>
-        </p:nvSpPr>
-        <p:spPr>
-          <a:xfrm>
-            <a:off x="381000" y="685800"/>
-            <a:ext cx="6096000" cy="3429000"/>
-          </a:xfrm>
-          <a:custGeom>
-            <a:avLst/>
-            <a:gdLst/>
-            <a:ahLst/>
-            <a:cxnLst/>
-            <a:rect l="l" t="t" r="r" b="b"/>
-            <a:pathLst>
-              <a:path w="120000" h="120000" extrusionOk="0">
-                <a:moveTo>
-                  <a:pt x="0" y="0"/>
-                </a:moveTo>
-                <a:lnTo>
-                  <a:pt x="120000" y="0"/>
-                </a:lnTo>
-                <a:lnTo>
-                  <a:pt x="120000" y="120000"/>
-                </a:lnTo>
-                <a:lnTo>
-                  <a:pt x="0" y="120000"/>
-                </a:lnTo>
-                <a:close/>
-              </a:path>
-            </a:pathLst>
-          </a:custGeom>
-        </p:spPr>
-      </p:sp>
-    </p:spTree>
-  </p:cSld>
-  <p:clrMapOvr>
-    <a:masterClrMapping/>
-  </p:clrMapOvr>
-</p:notes>
-</file>
-
-<file path=ppt/notesSlides/notesSlide6.xml><?xml version="1.0" encoding="utf-8"?>
-<p:notes xmlns:a="http://schemas.openxmlformats.org/drawingml/2006/main" xmlns:r="http://schemas.openxmlformats.org/officeDocument/2006/relationships" xmlns:p="http://schemas.openxmlformats.org/presentationml/2006/main" showMasterPhAnim="0" showMasterSp="0">
-  <p:cSld>
-    <p:spTree>
-      <p:nvGrpSpPr>
-        <p:cNvPr id="1" name="Shape 271"/>
-        <p:cNvGrpSpPr/>
-        <p:nvPr/>
-      </p:nvGrpSpPr>
-      <p:grpSpPr>
-        <a:xfrm>
-          <a:off x="0" y="0"/>
-          <a:ext cx="0" cy="0"/>
-          <a:chOff x="0" y="0"/>
-          <a:chExt cx="0" cy="0"/>
-        </a:xfrm>
-      </p:grpSpPr>
-      <p:sp>
-        <p:nvSpPr>
-          <p:cNvPr id="272" name="Google Shape;272;p18:notes"/>
-          <p:cNvSpPr txBox="1">
-            <a:spLocks noGrp="1"/>
-          </p:cNvSpPr>
-          <p:nvPr>
-            <p:ph type="body" idx="1"/>
-          </p:nvPr>
-        </p:nvSpPr>
-        <p:spPr>
-          <a:xfrm>
-            <a:off x="685800" y="4343400"/>
-            <a:ext cx="5486400" cy="4114800"/>
-          </a:xfrm>
-          <a:prstGeom prst="rect">
-            <a:avLst/>
-          </a:prstGeom>
-        </p:spPr>
-        <p:txBody>
-          <a:bodyPr spcFirstLastPara="1" wrap="square" lIns="91425" tIns="91425" rIns="91425" bIns="91425" anchor="t" anchorCtr="0">
-            <a:noAutofit/>
-          </a:bodyPr>
-          <a:lstStyle/>
-          <a:p>
-            <a:pPr marL="0" lvl="0" indent="0" algn="l" rtl="0">
-              <a:spcBef>
-                <a:spcPts val="0"/>
-              </a:spcBef>
-              <a:spcAft>
-                <a:spcPts val="0"/>
-              </a:spcAft>
-              <a:buNone/>
-            </a:pPr>
-          </a:p>
-        </p:txBody>
-      </p:sp>
-      <p:sp>
-        <p:nvSpPr>
-          <p:cNvPr id="273" name="Google Shape;273;p18:notes"/>
           <p:cNvSpPr>
             <a:spLocks noGrp="1" noRot="1" noChangeAspect="1"/>
           </p:cNvSpPr>
@@ -1835,7 +1939,7 @@
   <p:cSld>
     <p:spTree>
       <p:nvGrpSpPr>
-        <p:cNvPr id="1" name="Shape 197"/>
+        <p:cNvPr id="1" name="Shape 271"/>
         <p:cNvGrpSpPr/>
         <p:nvPr/>
       </p:nvGrpSpPr>
@@ -1849,7 +1953,7 @@
       </p:grpSpPr>
       <p:sp>
         <p:nvSpPr>
-          <p:cNvPr id="198" name="Google Shape;198;p10:notes"/>
+          <p:cNvPr id="272" name="Google Shape;272;p18:notes"/>
           <p:cNvSpPr txBox="1">
             <a:spLocks noGrp="1"/>
           </p:cNvSpPr>
@@ -1886,7 +1990,7 @@
       </p:sp>
       <p:sp>
         <p:nvSpPr>
-          <p:cNvPr id="199" name="Google Shape;199;p10:notes"/>
+          <p:cNvPr id="273" name="Google Shape;273;p18:notes"/>
           <p:cNvSpPr>
             <a:spLocks noGrp="1" noRot="1" noChangeAspect="1"/>
           </p:cNvSpPr>
@@ -11422,6 +11526,253 @@
   <p:cSld>
     <p:spTree>
       <p:nvGrpSpPr>
+        <p:cNvPr id="1" name="Shape 274"/>
+        <p:cNvGrpSpPr/>
+        <p:nvPr/>
+      </p:nvGrpSpPr>
+      <p:grpSpPr>
+        <a:xfrm>
+          <a:off x="0" y="0"/>
+          <a:ext cx="0" cy="0"/>
+          <a:chOff x="0" y="0"/>
+          <a:chExt cx="0" cy="0"/>
+        </a:xfrm>
+      </p:grpSpPr>
+      <p:sp>
+        <p:nvSpPr>
+          <p:cNvPr id="280" name="Google Shape;280;p18"/>
+          <p:cNvSpPr/>
+          <p:nvPr/>
+        </p:nvSpPr>
+        <p:spPr>
+          <a:xfrm>
+            <a:off x="1218724" y="3360216"/>
+            <a:ext cx="7468553" cy="766048"/>
+          </a:xfrm>
+          <a:prstGeom prst="rect">
+            <a:avLst/>
+          </a:prstGeom>
+          <a:noFill/>
+          <a:ln>
+            <a:noFill/>
+          </a:ln>
+        </p:spPr>
+        <p:txBody>
+          <a:bodyPr spcFirstLastPara="1" wrap="square" lIns="0" tIns="0" rIns="0" bIns="0" anchor="t" anchorCtr="0">
+            <a:noAutofit/>
+          </a:bodyPr>
+          <a:lstStyle/>
+          <a:p>
+            <a:pPr marL="0" marR="0" lvl="0" indent="0" algn="l" rtl="0">
+              <a:lnSpc>
+                <a:spcPct val="162000"/>
+              </a:lnSpc>
+              <a:spcBef>
+                <a:spcPts val="0"/>
+              </a:spcBef>
+              <a:spcAft>
+                <a:spcPts val="0"/>
+              </a:spcAft>
+              <a:buClr>
+                <a:srgbClr val="2B3541"/>
+              </a:buClr>
+              <a:buSzPts val="1850"/>
+              <a:buFont typeface="Times New Roman" panose="02020603050405020304"/>
+              <a:buNone/>
+            </a:pPr>
+            <a:r>
+              <a:rPr lang="en-US" sz="1850" b="0" i="0" u="none" strike="noStrike" cap="none">
+                <a:solidFill>
+                  <a:srgbClr val="2B3541"/>
+                </a:solidFill>
+                <a:latin typeface="Times New Roman" panose="02020603050405020304"/>
+                <a:ea typeface="Times New Roman" panose="02020603050405020304"/>
+                <a:cs typeface="Times New Roman" panose="02020603050405020304"/>
+                <a:sym typeface="Times New Roman" panose="02020603050405020304"/>
+              </a:rPr>
+              <a:t>·</a:t>
+            </a:r>
+            <a:endParaRPr sz="1850" b="0" i="0" u="none" strike="noStrike" cap="none">
+              <a:solidFill>
+                <a:srgbClr val="000000"/>
+              </a:solidFill>
+              <a:latin typeface="Times New Roman" panose="02020603050405020304"/>
+              <a:ea typeface="Times New Roman" panose="02020603050405020304"/>
+              <a:cs typeface="Times New Roman" panose="02020603050405020304"/>
+              <a:sym typeface="Times New Roman" panose="02020603050405020304"/>
+            </a:endParaRPr>
+          </a:p>
+        </p:txBody>
+      </p:sp>
+      <p:sp>
+        <p:nvSpPr>
+          <p:cNvPr id="281" name="Google Shape;281;p18"/>
+          <p:cNvSpPr/>
+          <p:nvPr/>
+        </p:nvSpPr>
+        <p:spPr>
+          <a:xfrm>
+            <a:off x="1218724" y="4395464"/>
+            <a:ext cx="7468553" cy="766048"/>
+          </a:xfrm>
+          <a:prstGeom prst="rect">
+            <a:avLst/>
+          </a:prstGeom>
+          <a:noFill/>
+          <a:ln>
+            <a:noFill/>
+          </a:ln>
+        </p:spPr>
+        <p:txBody>
+          <a:bodyPr spcFirstLastPara="1" wrap="square" lIns="0" tIns="0" rIns="0" bIns="0" anchor="t" anchorCtr="0">
+            <a:noAutofit/>
+          </a:bodyPr>
+          <a:lstStyle/>
+          <a:p>
+            <a:pPr marL="0" marR="0" lvl="0" indent="0" algn="l" rtl="0">
+              <a:lnSpc>
+                <a:spcPct val="162000"/>
+              </a:lnSpc>
+              <a:spcBef>
+                <a:spcPts val="0"/>
+              </a:spcBef>
+              <a:spcAft>
+                <a:spcPts val="0"/>
+              </a:spcAft>
+              <a:buClr>
+                <a:srgbClr val="2B3541"/>
+              </a:buClr>
+              <a:buSzPts val="1850"/>
+              <a:buFont typeface="Times New Roman" panose="02020603050405020304"/>
+              <a:buNone/>
+            </a:pPr>
+            <a:r>
+              <a:rPr lang="en-US" sz="1850" b="0" i="0" u="none" strike="noStrike" cap="none">
+                <a:solidFill>
+                  <a:srgbClr val="2B3541"/>
+                </a:solidFill>
+                <a:latin typeface="Times New Roman" panose="02020603050405020304"/>
+                <a:ea typeface="Times New Roman" panose="02020603050405020304"/>
+                <a:cs typeface="Times New Roman" panose="02020603050405020304"/>
+                <a:sym typeface="Times New Roman" panose="02020603050405020304"/>
+              </a:rPr>
+              <a:t>·</a:t>
+            </a:r>
+            <a:endParaRPr sz="1850" b="0" i="0" u="none" strike="noStrike" cap="none">
+              <a:solidFill>
+                <a:srgbClr val="000000"/>
+              </a:solidFill>
+              <a:latin typeface="Times New Roman" panose="02020603050405020304"/>
+              <a:ea typeface="Times New Roman" panose="02020603050405020304"/>
+              <a:cs typeface="Times New Roman" panose="02020603050405020304"/>
+              <a:sym typeface="Times New Roman" panose="02020603050405020304"/>
+            </a:endParaRPr>
+          </a:p>
+        </p:txBody>
+      </p:sp>
+      <p:sp>
+        <p:nvSpPr>
+          <p:cNvPr id="282" name="Google Shape;282;p18"/>
+          <p:cNvSpPr/>
+          <p:nvPr/>
+        </p:nvSpPr>
+        <p:spPr>
+          <a:xfrm>
+            <a:off x="1218724" y="5430713"/>
+            <a:ext cx="7468553" cy="383024"/>
+          </a:xfrm>
+          <a:prstGeom prst="rect">
+            <a:avLst/>
+          </a:prstGeom>
+          <a:noFill/>
+          <a:ln>
+            <a:noFill/>
+          </a:ln>
+        </p:spPr>
+        <p:txBody>
+          <a:bodyPr spcFirstLastPara="1" wrap="square" lIns="0" tIns="0" rIns="0" bIns="0" anchor="t" anchorCtr="0">
+            <a:noAutofit/>
+          </a:bodyPr>
+          <a:lstStyle/>
+          <a:p>
+            <a:pPr marL="0" marR="0" lvl="0" indent="0" algn="l" rtl="0">
+              <a:lnSpc>
+                <a:spcPct val="162000"/>
+              </a:lnSpc>
+              <a:spcBef>
+                <a:spcPts val="0"/>
+              </a:spcBef>
+              <a:spcAft>
+                <a:spcPts val="0"/>
+              </a:spcAft>
+              <a:buClr>
+                <a:srgbClr val="2B3541"/>
+              </a:buClr>
+              <a:buSzPts val="1850"/>
+              <a:buFont typeface="Times New Roman" panose="02020603050405020304"/>
+              <a:buNone/>
+            </a:pPr>
+            <a:r>
+              <a:rPr lang="en-US" sz="1850" b="0" i="0" u="none" strike="noStrike" cap="none">
+                <a:solidFill>
+                  <a:srgbClr val="2B3541"/>
+                </a:solidFill>
+                <a:latin typeface="Times New Roman" panose="02020603050405020304"/>
+                <a:ea typeface="Times New Roman" panose="02020603050405020304"/>
+                <a:cs typeface="Times New Roman" panose="02020603050405020304"/>
+                <a:sym typeface="Times New Roman" panose="02020603050405020304"/>
+              </a:rPr>
+              <a:t>·</a:t>
+            </a:r>
+            <a:endParaRPr sz="1850" b="0" i="0" u="none" strike="noStrike" cap="none">
+              <a:solidFill>
+                <a:srgbClr val="000000"/>
+              </a:solidFill>
+              <a:latin typeface="Times New Roman" panose="02020603050405020304"/>
+              <a:ea typeface="Times New Roman" panose="02020603050405020304"/>
+              <a:cs typeface="Times New Roman" panose="02020603050405020304"/>
+              <a:sym typeface="Times New Roman" panose="02020603050405020304"/>
+            </a:endParaRPr>
+          </a:p>
+        </p:txBody>
+      </p:sp>
+      <p:pic>
+        <p:nvPicPr>
+          <p:cNvPr id="3" name="Picture 2" descr="Screenshot 2026-07-16 142638"/>
+          <p:cNvPicPr>
+            <a:picLocks noChangeAspect="1"/>
+          </p:cNvPicPr>
+          <p:nvPr/>
+        </p:nvPicPr>
+        <p:blipFill>
+          <a:blip r:embed="rId1"/>
+          <a:stretch>
+            <a:fillRect/>
+          </a:stretch>
+        </p:blipFill>
+        <p:spPr>
+          <a:xfrm>
+            <a:off x="59055" y="0"/>
+            <a:ext cx="12122150" cy="6648450"/>
+          </a:xfrm>
+          <a:prstGeom prst="rect">
+            <a:avLst/>
+          </a:prstGeom>
+        </p:spPr>
+      </p:pic>
+    </p:spTree>
+  </p:cSld>
+  <p:clrMapOvr>
+    <a:masterClrMapping/>
+  </p:clrMapOvr>
+</p:sld>
+</file>
+
+<file path=ppt/slides/slide11.xml><?xml version="1.0" encoding="utf-8"?>
+<p:sld xmlns:a="http://schemas.openxmlformats.org/drawingml/2006/main" xmlns:r="http://schemas.openxmlformats.org/officeDocument/2006/relationships" xmlns:p="http://schemas.openxmlformats.org/presentationml/2006/main">
+  <p:cSld>
+    <p:spTree>
+      <p:nvGrpSpPr>
         <p:cNvPr id="1" name="Shape 200"/>
         <p:cNvGrpSpPr/>
         <p:nvPr/>
@@ -11657,7 +12008,7 @@
 </p:sld>
 </file>
 
-<file path=ppt/slides/slide11.xml><?xml version="1.0" encoding="utf-8"?>
+<file path=ppt/slides/slide12.xml><?xml version="1.0" encoding="utf-8"?>
 <p:sld xmlns:a="http://schemas.openxmlformats.org/drawingml/2006/main" xmlns:r="http://schemas.openxmlformats.org/officeDocument/2006/relationships" xmlns:p="http://schemas.openxmlformats.org/presentationml/2006/main">
   <p:cSld>
     <p:spTree>
@@ -12017,7 +12368,7 @@
 </p:sld>
 </file>
 
-<file path=ppt/slides/slide12.xml><?xml version="1.0" encoding="utf-8"?>
+<file path=ppt/slides/slide13.xml><?xml version="1.0" encoding="utf-8"?>
 <p:sld xmlns:a="http://schemas.openxmlformats.org/drawingml/2006/main" xmlns:r="http://schemas.openxmlformats.org/officeDocument/2006/relationships" xmlns:p="http://schemas.openxmlformats.org/presentationml/2006/main">
   <p:cSld>
     <p:spTree>
@@ -12708,7 +13059,7 @@
 </p:sld>
 </file>
 
-<file path=ppt/slides/slide13.xml><?xml version="1.0" encoding="utf-8"?>
+<file path=ppt/slides/slide14.xml><?xml version="1.0" encoding="utf-8"?>
 <p:sld xmlns:a="http://schemas.openxmlformats.org/drawingml/2006/main" xmlns:r="http://schemas.openxmlformats.org/officeDocument/2006/relationships" xmlns:p="http://schemas.openxmlformats.org/presentationml/2006/main">
   <p:cSld>
     <p:spTree>
@@ -12821,7 +13172,7 @@
 </p:sld>
 </file>
 
-<file path=ppt/slides/slide14.xml><?xml version="1.0" encoding="utf-8"?>
+<file path=ppt/slides/slide15.xml><?xml version="1.0" encoding="utf-8"?>
 <p:sld xmlns:a="http://schemas.openxmlformats.org/drawingml/2006/main" xmlns:r="http://schemas.openxmlformats.org/officeDocument/2006/relationships" xmlns:p="http://schemas.openxmlformats.org/presentationml/2006/main">
   <p:cSld>
     <p:spTree>
@@ -12950,7 +13301,7 @@
 </p:sld>
 </file>
 
-<file path=ppt/slides/slide15.xml><?xml version="1.0" encoding="utf-8"?>
+<file path=ppt/slides/slide16.xml><?xml version="1.0" encoding="utf-8"?>
 <p:sld xmlns:a="http://schemas.openxmlformats.org/drawingml/2006/main" xmlns:r="http://schemas.openxmlformats.org/officeDocument/2006/relationships" xmlns:p="http://schemas.openxmlformats.org/presentationml/2006/main">
   <p:cSld>
     <p:spTree>
@@ -14078,7 +14429,7 @@
         <p:spPr>
           <a:xfrm>
             <a:off x="455468" y="1168656"/>
-            <a:ext cx="10607040" cy="5046345"/>
+            <a:ext cx="10607040" cy="4246245"/>
           </a:xfrm>
           <a:prstGeom prst="rect">
             <a:avLst/>
@@ -14096,114 +14447,115 @@
           </a:p>
           <a:p>
             <a:r>
-              <a:rPr lang="en-US" altLang="en-GB"/>
-              <a:t>The Challenge</a:t>
+              <a:rPr lang="en-US" altLang="en-GB" sz="1600"/>
+              <a:t>Step 1: User Input</a:t>
             </a:r>
-            <a:endParaRPr lang="en-US" altLang="en-GB"/>
+            <a:endParaRPr lang="en-US" altLang="en-GB" sz="1600"/>
           </a:p>
           <a:p>
             <a:r>
-              <a:rPr lang="en-US" altLang="en-GB"/>
-              <a:t>Access to legal advice is often expensive, time-consuming, and complex. Individuals and small businesses struggle to understand contracts, rights, and compliance due to scattered resources and legal jargon. Traditional legal aid systems are limited by availability of experts and lack of real-time support.</a:t>
+              <a:rPr lang="en-US" altLang="en-GB" sz="1600"/>
+              <a:t>User enters a legal query or uploads a legal document (contract, policy, notice, etc.) through the dashboard.</a:t>
             </a:r>
-            <a:endParaRPr lang="en-US" altLang="en-GB"/>
+            <a:endParaRPr lang="en-US" altLang="en-GB" sz="1600"/>
           </a:p>
           <a:p>
             <a:r>
-              <a:rPr lang="en-US" altLang="en-GB"/>
-              <a:t>The Objective</a:t>
+              <a:rPr lang="en-US" altLang="en-GB" sz="1600"/>
+              <a:t>Step 2: Query &amp; Document Processing</a:t>
             </a:r>
-            <a:endParaRPr lang="en-US" altLang="en-GB"/>
+            <a:endParaRPr lang="en-US" altLang="en-GB" sz="1600"/>
           </a:p>
           <a:p>
             <a:r>
-              <a:rPr lang="en-US" altLang="en-GB"/>
-              <a:t>Build an AI-powered Multi-Agent Legal Aid System that can:</a:t>
+              <a:rPr lang="en-US" altLang="en-GB" sz="1600"/>
+              <a:t>The system identifies the user's intent and extracts text from uploaded documents for analysis.</a:t>
             </a:r>
-            <a:endParaRPr lang="en-US" altLang="en-GB"/>
+            <a:endParaRPr lang="en-US" altLang="en-GB" sz="1600"/>
           </a:p>
           <a:p>
             <a:r>
-              <a:rPr lang="en-US" altLang="en-GB"/>
-              <a:t>1.Legal Information Retrieval (RAG) – Use Retrieval-Augmented Generation to extract and summarize relevant laws, precedents, and compliance rules from large legal corpora.</a:t>
+              <a:rPr lang="en-US" altLang="en-GB" sz="1600"/>
+              <a:t>Step 3: RAG-Based Legal Information Retrieval</a:t>
             </a:r>
-            <a:endParaRPr lang="en-US" altLang="en-GB"/>
+            <a:endParaRPr lang="en-US" altLang="en-GB" sz="1600"/>
           </a:p>
           <a:p>
             <a:r>
-              <a:rPr lang="en-US" altLang="en-GB"/>
-              <a:t>2.Document Parsing &amp; Analysis – Automatically analyze contracts, policies, and notices to highlight key clauses, obligations, and potential risks.</a:t>
+              <a:rPr lang="en-US" altLang="en-GB" sz="1600"/>
+              <a:t>The Q&amp;A RAG Agent retrieves relevant laws, regulations, precedents, and compliance rules from legal databases.</a:t>
             </a:r>
-            <a:endParaRPr lang="en-US" altLang="en-GB"/>
+            <a:endParaRPr lang="en-US" altLang="en-GB" sz="1600"/>
           </a:p>
           <a:p>
             <a:r>
-              <a:rPr lang="en-US" altLang="en-GB"/>
-              <a:t>3.Conversational Legal Assistant – Provide empathetic, easy-to-understand explanations of legal concepts through natural dialogue (with disclaimers: not a substitute for a lawyer).</a:t>
+              <a:rPr lang="en-US" altLang="en-GB" sz="1600"/>
+              <a:t>Generates accurate, source-based legal information.</a:t>
             </a:r>
-            <a:endParaRPr lang="en-US" altLang="en-GB"/>
+            <a:endParaRPr lang="en-US" altLang="en-GB" sz="1600"/>
           </a:p>
           <a:p>
             <a:r>
-              <a:rPr lang="en-US" altLang="en-GB"/>
-              <a:t>4.Specialized Multi-Agents –</a:t>
+              <a:rPr lang="en-US" altLang="en-GB" sz="1600"/>
+              <a:t>Step 4: Document Analysis</a:t>
             </a:r>
-            <a:endParaRPr lang="en-US" altLang="en-GB"/>
+            <a:endParaRPr lang="en-US" altLang="en-GB" sz="1600"/>
           </a:p>
           <a:p>
             <a:r>
-              <a:rPr lang="en-US" altLang="en-GB"/>
-              <a:t>•Contract Reviewer Agent: Flag risks and inconsistencies.</a:t>
+              <a:rPr lang="en-US" altLang="en-GB" sz="1600"/>
+              <a:t>The Document Parsing Agent extracts key clauses, obligations, deadlines, penalties, and important terms.</a:t>
             </a:r>
-            <a:endParaRPr lang="en-US" altLang="en-GB"/>
+            <a:endParaRPr lang="en-US" altLang="en-GB" sz="1600"/>
           </a:p>
           <a:p>
             <a:r>
-              <a:rPr lang="en-US" altLang="en-GB"/>
-              <a:t>•Compliance Checker Agent: Verify adherence to rules/regulations.</a:t>
+              <a:rPr lang="en-US" altLang="en-GB" sz="1600"/>
+              <a:t>Identifies potential legal risks and inconsistencies.</a:t>
             </a:r>
-            <a:endParaRPr lang="en-US" altLang="en-GB"/>
+            <a:endParaRPr lang="en-US" altLang="en-GB" sz="1600"/>
           </a:p>
           <a:p>
             <a:r>
-              <a:rPr lang="en-US" altLang="en-GB"/>
-              <a:t>•Q&amp;A RAG Agent: Answer user-specific queries.</a:t>
+              <a:rPr lang="en-US" altLang="en-GB" sz="1600"/>
+              <a:t>Step 5: Specialized Multi-Agent Processing</a:t>
             </a:r>
-            <a:endParaRPr lang="en-US" altLang="en-GB"/>
+            <a:endParaRPr lang="en-US" altLang="en-GB" sz="1600"/>
           </a:p>
           <a:p>
             <a:r>
-              <a:rPr lang="en-US" altLang="en-GB"/>
-              <a:t>•Case Research Agent: Fetch relevant judgments or case summaries.</a:t>
+              <a:rPr lang="en-US" altLang="en-GB" sz="1600"/>
+              <a:t>Contract Reviewer Agent: Reviews contracts and flags risky or missing clauses.</a:t>
             </a:r>
-            <a:endParaRPr lang="en-US" altLang="en-GB"/>
-          </a:p>
-          <a:p>
-            <a:endParaRPr lang="en-US" altLang="en-GB"/>
+            <a:endParaRPr lang="en-US" altLang="en-GB" sz="1600"/>
           </a:p>
           <a:p>
             <a:r>
-              <a:rPr lang="en-US" altLang="en-GB"/>
-              <a:t>5.User-Friendly Dashboard – Deliver recommendations, case insights, and document highlights in a structured, visual format.</a:t>
+              <a:rPr lang="en-US" altLang="en-GB" sz="1600"/>
+              <a:t>Compliance Checker Agent: Verifies compliance with applicable laws and regulations.</a:t>
             </a:r>
-            <a:endParaRPr lang="en-US" altLang="en-GB"/>
+            <a:endParaRPr lang="en-US" altLang="en-GB" sz="1600"/>
           </a:p>
           <a:p>
             <a:r>
-              <a:rPr lang="en-US" altLang="en-GB"/>
-              <a:t>Tech Stack (Mandatory)</a:t>
+              <a:rPr lang="en-US" altLang="en-GB" sz="1600"/>
+              <a:t>Case Research Agent: Retrieves relevant judgments and case summaries.</a:t>
             </a:r>
-            <a:endParaRPr lang="en-US" altLang="en-GB"/>
+            <a:endParaRPr lang="en-US" altLang="en-GB" sz="1600"/>
           </a:p>
           <a:p>
             <a:r>
-              <a:rPr lang="en-US" altLang="en-GB"/>
-              <a:t>•IBM Langflow / IBM Orchestrate + IBM Models</a:t>
+              <a:rPr lang="en-US" altLang="en-GB" sz="1600"/>
+              <a:t>Q&amp;A RAG Agent: Answers user-specific legal questions using retrieved legal knowledge.</a:t>
             </a:r>
-            <a:endParaRPr lang="en-US" altLang="en-GB"/>
+            <a:endParaRPr lang="en-US" altLang="en-GB" sz="1600"/>
           </a:p>
           <a:p>
-            <a:endParaRPr lang="en-US" altLang="en-GB"/>
+            <a:r>
+              <a:rPr lang="en-US" altLang="en-GB" sz="1600"/>
+              <a:t>red format.</a:t>
+            </a:r>
+            <a:endParaRPr lang="en-US" altLang="en-GB" sz="1600"/>
           </a:p>
         </p:txBody>
       </p:sp>
@@ -14246,6 +14598,179 @@
 </file>
 
 <file path=ppt/slides/slide5.xml><?xml version="1.0" encoding="utf-8"?>
+<p:sld xmlns:a="http://schemas.openxmlformats.org/drawingml/2006/main" xmlns:r="http://schemas.openxmlformats.org/officeDocument/2006/relationships" xmlns:p="http://schemas.openxmlformats.org/presentationml/2006/main">
+  <p:cSld>
+    <p:spTree>
+      <p:nvGrpSpPr>
+        <p:cNvPr id="1" name="Shape 103"/>
+        <p:cNvGrpSpPr/>
+        <p:nvPr/>
+      </p:nvGrpSpPr>
+      <p:grpSpPr>
+        <a:xfrm>
+          <a:off x="0" y="0"/>
+          <a:ext cx="0" cy="0"/>
+          <a:chOff x="0" y="0"/>
+          <a:chExt cx="0" cy="0"/>
+        </a:xfrm>
+      </p:grpSpPr>
+      <p:sp>
+        <p:nvSpPr>
+          <p:cNvPr id="2" name="TextBox 1"/>
+          <p:cNvSpPr txBox="1"/>
+          <p:nvPr/>
+        </p:nvSpPr>
+        <p:spPr>
+          <a:xfrm>
+            <a:off x="455468" y="1168656"/>
+            <a:ext cx="10607040" cy="3753485"/>
+          </a:xfrm>
+          <a:prstGeom prst="rect">
+            <a:avLst/>
+          </a:prstGeom>
+          <a:noFill/>
+        </p:spPr>
+        <p:txBody>
+          <a:bodyPr wrap="square" rtlCol="0">
+            <a:spAutoFit/>
+          </a:bodyPr>
+          <a:lstStyle/>
+          <a:p>
+            <a:pPr fontAlgn="base"/>
+            <a:endParaRPr lang="en-US" altLang="en-GB"/>
+          </a:p>
+          <a:p>
+            <a:r>
+              <a:rPr lang="en-US" altLang="en-GB" sz="1600"/>
+              <a:t>Step 7: Conversational Legal Assistance</a:t>
+            </a:r>
+            <a:endParaRPr lang="en-US" altLang="en-GB" sz="1600"/>
+          </a:p>
+          <a:p>
+            <a:r>
+              <a:rPr lang="en-US" altLang="en-GB" sz="1600"/>
+              <a:t>The AI assistant explains legal findings in simple, easy-to-understand language.</a:t>
+            </a:r>
+            <a:endParaRPr lang="en-US" altLang="en-GB" sz="1600"/>
+          </a:p>
+          <a:p>
+            <a:r>
+              <a:rPr lang="en-US" altLang="en-GB" sz="1600"/>
+              <a:t>Displays a disclaimer that the advice is for informational purposes and not a substitute for a lawyer.</a:t>
+            </a:r>
+            <a:endParaRPr lang="en-US" altLang="en-GB" sz="1600"/>
+          </a:p>
+          <a:p>
+            <a:r>
+              <a:rPr lang="en-US" altLang="en-GB" sz="1600"/>
+              <a:t>Step 8: Dashboard &amp; Recommendations</a:t>
+            </a:r>
+            <a:endParaRPr lang="en-US" altLang="en-GB" sz="1600"/>
+          </a:p>
+          <a:p>
+            <a:r>
+              <a:rPr lang="en-US" altLang="en-GB" sz="1600"/>
+              <a:t>The dashboard presents:</a:t>
+            </a:r>
+            <a:endParaRPr lang="en-US" altLang="en-GB" sz="1600"/>
+          </a:p>
+          <a:p>
+            <a:r>
+              <a:rPr lang="en-US" altLang="en-GB" sz="1600"/>
+              <a:t>Legal summary</a:t>
+            </a:r>
+            <a:endParaRPr lang="en-US" altLang="en-GB" sz="1600"/>
+          </a:p>
+          <a:p>
+            <a:r>
+              <a:rPr lang="en-US" altLang="en-GB" sz="1600"/>
+              <a:t>Document highlights</a:t>
+            </a:r>
+            <a:endParaRPr lang="en-US" altLang="en-GB" sz="1600"/>
+          </a:p>
+          <a:p>
+            <a:r>
+              <a:rPr lang="en-US" altLang="en-GB" sz="1600"/>
+              <a:t>Risk assessment</a:t>
+            </a:r>
+            <a:endParaRPr lang="en-US" altLang="en-GB" sz="1600"/>
+          </a:p>
+          <a:p>
+            <a:r>
+              <a:rPr lang="en-US" altLang="en-GB" sz="1600"/>
+              <a:t>Compliance status</a:t>
+            </a:r>
+            <a:endParaRPr lang="en-US" altLang="en-GB" sz="1600"/>
+          </a:p>
+          <a:p>
+            <a:r>
+              <a:rPr lang="en-US" altLang="en-GB" sz="1600"/>
+              <a:t>Relevant case references</a:t>
+            </a:r>
+            <a:endParaRPr lang="en-US" altLang="en-GB" sz="1600"/>
+          </a:p>
+          <a:p>
+            <a:r>
+              <a:rPr lang="en-US" altLang="en-GB" sz="1600"/>
+              <a:t>Actionable recommendations and next steps</a:t>
+            </a:r>
+            <a:endParaRPr lang="en-US" altLang="en-GB" sz="1600"/>
+          </a:p>
+          <a:p>
+            <a:r>
+              <a:rPr lang="en-US" altLang="en-GB" sz="1600"/>
+              <a:t>Step 9: Final Output</a:t>
+            </a:r>
+            <a:endParaRPr lang="en-US" altLang="en-GB" sz="1600"/>
+          </a:p>
+          <a:p>
+            <a:r>
+              <a:rPr lang="en-US" altLang="en-GB" sz="1600"/>
+              <a:t>The user receives a comprehensive legal report with document analysis, cited legal sources, compliance results, and practical guidance in a clear and structured format.</a:t>
+            </a:r>
+            <a:endParaRPr lang="en-US" altLang="en-GB" sz="1600"/>
+          </a:p>
+        </p:txBody>
+      </p:sp>
+      <p:sp>
+        <p:nvSpPr>
+          <p:cNvPr id="3" name="TextBox 2"/>
+          <p:cNvSpPr txBox="1"/>
+          <p:nvPr/>
+        </p:nvSpPr>
+        <p:spPr>
+          <a:xfrm>
+            <a:off x="576072" y="704088"/>
+            <a:ext cx="7214616" cy="461665"/>
+          </a:xfrm>
+          <a:prstGeom prst="rect">
+            <a:avLst/>
+          </a:prstGeom>
+          <a:noFill/>
+        </p:spPr>
+        <p:txBody>
+          <a:bodyPr wrap="square" rtlCol="0">
+            <a:spAutoFit/>
+          </a:bodyPr>
+          <a:lstStyle/>
+          <a:p>
+            <a:r>
+              <a:rPr lang="en-US" sz="2400" b="1"/>
+              <a:t>Proposed Solution -</a:t>
+            </a:r>
+            <a:endParaRPr lang="en-IN" sz="2400" b="1"/>
+          </a:p>
+        </p:txBody>
+      </p:sp>
+    </p:spTree>
+  </p:cSld>
+  <p:clrMapOvr>
+    <a:masterClrMapping/>
+  </p:clrMapOvr>
+</p:sld>
+</file>
+
+<file path=ppt/slides/slide6.xml><?xml version="1.0" encoding="utf-8"?>
 <p:sld xmlns:a="http://schemas.openxmlformats.org/drawingml/2006/main" xmlns:r="http://schemas.openxmlformats.org/officeDocument/2006/relationships" xmlns:p="http://schemas.openxmlformats.org/presentationml/2006/main">
   <p:cSld>
     <p:spTree>
@@ -14463,7 +14988,7 @@
 </p:sld>
 </file>
 
-<file path=ppt/slides/slide6.xml><?xml version="1.0" encoding="utf-8"?>
+<file path=ppt/slides/slide7.xml><?xml version="1.0" encoding="utf-8"?>
 <p:sld xmlns:a="http://schemas.openxmlformats.org/drawingml/2006/main" xmlns:r="http://schemas.openxmlformats.org/officeDocument/2006/relationships" xmlns:p="http://schemas.openxmlformats.org/presentationml/2006/main">
   <p:cSld>
     <p:spTree>
@@ -14594,7 +15119,7 @@
 </p:sld>
 </file>
 
-<file path=ppt/slides/slide7.xml><?xml version="1.0" encoding="utf-8"?>
+<file path=ppt/slides/slide8.xml><?xml version="1.0" encoding="utf-8"?>
 <p:sld xmlns:a="http://schemas.openxmlformats.org/drawingml/2006/main" xmlns:r="http://schemas.openxmlformats.org/officeDocument/2006/relationships" xmlns:p="http://schemas.openxmlformats.org/presentationml/2006/main">
   <p:cSld>
     <p:spTree>
@@ -14912,7 +15437,7 @@
 </p:sld>
 </file>
 
-<file path=ppt/slides/slide8.xml><?xml version="1.0" encoding="utf-8"?>
+<file path=ppt/slides/slide9.xml><?xml version="1.0" encoding="utf-8"?>
 <p:sld xmlns:a="http://schemas.openxmlformats.org/drawingml/2006/main" xmlns:r="http://schemas.openxmlformats.org/officeDocument/2006/relationships" xmlns:p="http://schemas.openxmlformats.org/presentationml/2006/main">
   <p:cSld>
     <p:spTree>
@@ -15145,253 +15670,6 @@
           <a:xfrm>
             <a:off x="1231265" y="566420"/>
             <a:ext cx="10205720" cy="5873115"/>
-          </a:xfrm>
-          <a:prstGeom prst="rect">
-            <a:avLst/>
-          </a:prstGeom>
-        </p:spPr>
-      </p:pic>
-    </p:spTree>
-  </p:cSld>
-  <p:clrMapOvr>
-    <a:masterClrMapping/>
-  </p:clrMapOvr>
-</p:sld>
-</file>
-
-<file path=ppt/slides/slide9.xml><?xml version="1.0" encoding="utf-8"?>
-<p:sld xmlns:a="http://schemas.openxmlformats.org/drawingml/2006/main" xmlns:r="http://schemas.openxmlformats.org/officeDocument/2006/relationships" xmlns:p="http://schemas.openxmlformats.org/presentationml/2006/main">
-  <p:cSld>
-    <p:spTree>
-      <p:nvGrpSpPr>
-        <p:cNvPr id="1" name="Shape 274"/>
-        <p:cNvGrpSpPr/>
-        <p:nvPr/>
-      </p:nvGrpSpPr>
-      <p:grpSpPr>
-        <a:xfrm>
-          <a:off x="0" y="0"/>
-          <a:ext cx="0" cy="0"/>
-          <a:chOff x="0" y="0"/>
-          <a:chExt cx="0" cy="0"/>
-        </a:xfrm>
-      </p:grpSpPr>
-      <p:sp>
-        <p:nvSpPr>
-          <p:cNvPr id="280" name="Google Shape;280;p18"/>
-          <p:cNvSpPr/>
-          <p:nvPr/>
-        </p:nvSpPr>
-        <p:spPr>
-          <a:xfrm>
-            <a:off x="1218724" y="3360216"/>
-            <a:ext cx="7468553" cy="766048"/>
-          </a:xfrm>
-          <a:prstGeom prst="rect">
-            <a:avLst/>
-          </a:prstGeom>
-          <a:noFill/>
-          <a:ln>
-            <a:noFill/>
-          </a:ln>
-        </p:spPr>
-        <p:txBody>
-          <a:bodyPr spcFirstLastPara="1" wrap="square" lIns="0" tIns="0" rIns="0" bIns="0" anchor="t" anchorCtr="0">
-            <a:noAutofit/>
-          </a:bodyPr>
-          <a:lstStyle/>
-          <a:p>
-            <a:pPr marL="0" marR="0" lvl="0" indent="0" algn="l" rtl="0">
-              <a:lnSpc>
-                <a:spcPct val="162000"/>
-              </a:lnSpc>
-              <a:spcBef>
-                <a:spcPts val="0"/>
-              </a:spcBef>
-              <a:spcAft>
-                <a:spcPts val="0"/>
-              </a:spcAft>
-              <a:buClr>
-                <a:srgbClr val="2B3541"/>
-              </a:buClr>
-              <a:buSzPts val="1850"/>
-              <a:buFont typeface="Times New Roman" panose="02020603050405020304"/>
-              <a:buNone/>
-            </a:pPr>
-            <a:r>
-              <a:rPr lang="en-US" sz="1850" b="0" i="0" u="none" strike="noStrike" cap="none">
-                <a:solidFill>
-                  <a:srgbClr val="2B3541"/>
-                </a:solidFill>
-                <a:latin typeface="Times New Roman" panose="02020603050405020304"/>
-                <a:ea typeface="Times New Roman" panose="02020603050405020304"/>
-                <a:cs typeface="Times New Roman" panose="02020603050405020304"/>
-                <a:sym typeface="Times New Roman" panose="02020603050405020304"/>
-              </a:rPr>
-              <a:t>·</a:t>
-            </a:r>
-            <a:endParaRPr sz="1850" b="0" i="0" u="none" strike="noStrike" cap="none">
-              <a:solidFill>
-                <a:srgbClr val="000000"/>
-              </a:solidFill>
-              <a:latin typeface="Times New Roman" panose="02020603050405020304"/>
-              <a:ea typeface="Times New Roman" panose="02020603050405020304"/>
-              <a:cs typeface="Times New Roman" panose="02020603050405020304"/>
-              <a:sym typeface="Times New Roman" panose="02020603050405020304"/>
-            </a:endParaRPr>
-          </a:p>
-        </p:txBody>
-      </p:sp>
-      <p:sp>
-        <p:nvSpPr>
-          <p:cNvPr id="281" name="Google Shape;281;p18"/>
-          <p:cNvSpPr/>
-          <p:nvPr/>
-        </p:nvSpPr>
-        <p:spPr>
-          <a:xfrm>
-            <a:off x="1218724" y="4395464"/>
-            <a:ext cx="7468553" cy="766048"/>
-          </a:xfrm>
-          <a:prstGeom prst="rect">
-            <a:avLst/>
-          </a:prstGeom>
-          <a:noFill/>
-          <a:ln>
-            <a:noFill/>
-          </a:ln>
-        </p:spPr>
-        <p:txBody>
-          <a:bodyPr spcFirstLastPara="1" wrap="square" lIns="0" tIns="0" rIns="0" bIns="0" anchor="t" anchorCtr="0">
-            <a:noAutofit/>
-          </a:bodyPr>
-          <a:lstStyle/>
-          <a:p>
-            <a:pPr marL="0" marR="0" lvl="0" indent="0" algn="l" rtl="0">
-              <a:lnSpc>
-                <a:spcPct val="162000"/>
-              </a:lnSpc>
-              <a:spcBef>
-                <a:spcPts val="0"/>
-              </a:spcBef>
-              <a:spcAft>
-                <a:spcPts val="0"/>
-              </a:spcAft>
-              <a:buClr>
-                <a:srgbClr val="2B3541"/>
-              </a:buClr>
-              <a:buSzPts val="1850"/>
-              <a:buFont typeface="Times New Roman" panose="02020603050405020304"/>
-              <a:buNone/>
-            </a:pPr>
-            <a:r>
-              <a:rPr lang="en-US" sz="1850" b="0" i="0" u="none" strike="noStrike" cap="none">
-                <a:solidFill>
-                  <a:srgbClr val="2B3541"/>
-                </a:solidFill>
-                <a:latin typeface="Times New Roman" panose="02020603050405020304"/>
-                <a:ea typeface="Times New Roman" panose="02020603050405020304"/>
-                <a:cs typeface="Times New Roman" panose="02020603050405020304"/>
-                <a:sym typeface="Times New Roman" panose="02020603050405020304"/>
-              </a:rPr>
-              <a:t>·</a:t>
-            </a:r>
-            <a:endParaRPr sz="1850" b="0" i="0" u="none" strike="noStrike" cap="none">
-              <a:solidFill>
-                <a:srgbClr val="000000"/>
-              </a:solidFill>
-              <a:latin typeface="Times New Roman" panose="02020603050405020304"/>
-              <a:ea typeface="Times New Roman" panose="02020603050405020304"/>
-              <a:cs typeface="Times New Roman" panose="02020603050405020304"/>
-              <a:sym typeface="Times New Roman" panose="02020603050405020304"/>
-            </a:endParaRPr>
-          </a:p>
-        </p:txBody>
-      </p:sp>
-      <p:sp>
-        <p:nvSpPr>
-          <p:cNvPr id="282" name="Google Shape;282;p18"/>
-          <p:cNvSpPr/>
-          <p:nvPr/>
-        </p:nvSpPr>
-        <p:spPr>
-          <a:xfrm>
-            <a:off x="1218724" y="5430713"/>
-            <a:ext cx="7468553" cy="383024"/>
-          </a:xfrm>
-          <a:prstGeom prst="rect">
-            <a:avLst/>
-          </a:prstGeom>
-          <a:noFill/>
-          <a:ln>
-            <a:noFill/>
-          </a:ln>
-        </p:spPr>
-        <p:txBody>
-          <a:bodyPr spcFirstLastPara="1" wrap="square" lIns="0" tIns="0" rIns="0" bIns="0" anchor="t" anchorCtr="0">
-            <a:noAutofit/>
-          </a:bodyPr>
-          <a:lstStyle/>
-          <a:p>
-            <a:pPr marL="0" marR="0" lvl="0" indent="0" algn="l" rtl="0">
-              <a:lnSpc>
-                <a:spcPct val="162000"/>
-              </a:lnSpc>
-              <a:spcBef>
-                <a:spcPts val="0"/>
-              </a:spcBef>
-              <a:spcAft>
-                <a:spcPts val="0"/>
-              </a:spcAft>
-              <a:buClr>
-                <a:srgbClr val="2B3541"/>
-              </a:buClr>
-              <a:buSzPts val="1850"/>
-              <a:buFont typeface="Times New Roman" panose="02020603050405020304"/>
-              <a:buNone/>
-            </a:pPr>
-            <a:r>
-              <a:rPr lang="en-US" sz="1850" b="0" i="0" u="none" strike="noStrike" cap="none">
-                <a:solidFill>
-                  <a:srgbClr val="2B3541"/>
-                </a:solidFill>
-                <a:latin typeface="Times New Roman" panose="02020603050405020304"/>
-                <a:ea typeface="Times New Roman" panose="02020603050405020304"/>
-                <a:cs typeface="Times New Roman" panose="02020603050405020304"/>
-                <a:sym typeface="Times New Roman" panose="02020603050405020304"/>
-              </a:rPr>
-              <a:t>·</a:t>
-            </a:r>
-            <a:endParaRPr sz="1850" b="0" i="0" u="none" strike="noStrike" cap="none">
-              <a:solidFill>
-                <a:srgbClr val="000000"/>
-              </a:solidFill>
-              <a:latin typeface="Times New Roman" panose="02020603050405020304"/>
-              <a:ea typeface="Times New Roman" panose="02020603050405020304"/>
-              <a:cs typeface="Times New Roman" panose="02020603050405020304"/>
-              <a:sym typeface="Times New Roman" panose="02020603050405020304"/>
-            </a:endParaRPr>
-          </a:p>
-        </p:txBody>
-      </p:sp>
-      <p:pic>
-        <p:nvPicPr>
-          <p:cNvPr id="3" name="Picture 2" descr="Screenshot 2026-07-16 142638"/>
-          <p:cNvPicPr>
-            <a:picLocks noChangeAspect="1"/>
-          </p:cNvPicPr>
-          <p:nvPr/>
-        </p:nvPicPr>
-        <p:blipFill>
-          <a:blip r:embed="rId1"/>
-          <a:stretch>
-            <a:fillRect/>
-          </a:stretch>
-        </p:blipFill>
-        <p:spPr>
-          <a:xfrm>
-            <a:off x="59055" y="0"/>
-            <a:ext cx="12122150" cy="6648450"/>
           </a:xfrm>
           <a:prstGeom prst="rect">
             <a:avLst/>
